--- a/domain-seminars/week13_cross_domain_applications.pptx
+++ b/domain-seminars/week13_cross_domain_applications.pptx
@@ -506,7 +506,7 @@
           <a:lstStyle/>
           <a:p>
             <a:r>
-              <a:t>Domain seminar for week 13: Cross Domain Applications. It follows the course pattern: basics and terminology, where the topic sits in industry and policy, reform goals, how analytics is deployed, and how analytics drives decisions. Replace this note with your own opening remarks.</a:t>
+              <a:t>Domain seminar for week 13: Cross Domain Applications. We will go through basics and terminology, where the topic is found across industry and policy, reform goals, how analytics is deployed, and how analytics drives decisions. Provide opening remarks here.</a:t>
             </a:r>
           </a:p>
         </p:txBody>

--- a/domain-seminars/week13_cross_domain_applications.pptx
+++ b/domain-seminars/week13_cross_domain_applications.pptx
@@ -11,6 +11,7 @@
     <p:sldId id="269" r:id="rId20"/>
     <p:sldId id="270" r:id="rId21"/>
     <p:sldId id="271" r:id="rId22"/>
+    <p:sldId id="272" r:id="rId11"/>
   </p:sldIdLst>
   <p:notesMasterIdLst>
     <p:notesMasterId r:id="rId12"/>
@@ -857,6 +858,76 @@
           <a:p>
             <a:r>
               <a:t>Bring together everything from the term: data you trust, measures defined carefully, effects estimated without selection bias, and predictions used for targeting. The final step is judgment: state the recommendation, the expected return, what could make it wrong, and what to monitor after launch.</a:t>
+            </a:r>
+          </a:p>
+        </p:txBody>
+      </p:sp>
+      <p:sp>
+        <p:nvSpPr>
+          <p:cNvPr id="4" name="Slide Number Placeholder 3"/>
+          <p:cNvSpPr>
+            <a:spLocks noGrp="1"/>
+          </p:cNvSpPr>
+          <p:nvPr>
+            <p:ph type="sldNum" idx="5" sz="quarter"/>
+          </p:nvPr>
+        </p:nvSpPr>
+        <p:spPr/>
+      </p:sp>
+    </p:spTree>
+  </p:cSld>
+  <p:clrMapOvr>
+    <a:masterClrMapping/>
+  </p:clrMapOvr>
+</p:notes>
+</file>
+
+<file path=ppt/notesSlides/notesSlide7.xml><?xml version="1.0" encoding="utf-8"?>
+<p:notes xmlns:a="http://schemas.openxmlformats.org/drawingml/2006/main" xmlns:p="http://schemas.openxmlformats.org/presentationml/2006/main" xmlns:r="http://schemas.openxmlformats.org/officeDocument/2006/relationships">
+  <p:cSld>
+    <p:spTree>
+      <p:nvGrpSpPr>
+        <p:cNvPr id="1" name=""/>
+        <p:cNvGrpSpPr/>
+        <p:nvPr/>
+      </p:nvGrpSpPr>
+      <p:grpSpPr>
+        <a:xfrm>
+          <a:off x="0" y="0"/>
+          <a:ext cx="0" cy="0"/>
+          <a:chOff x="0" y="0"/>
+          <a:chExt cx="0" cy="0"/>
+        </a:xfrm>
+      </p:grpSpPr>
+      <p:sp>
+        <p:nvSpPr>
+          <p:cNvPr id="2" name="Slide Image Placeholder 1"/>
+          <p:cNvSpPr>
+            <a:spLocks noGrp="1"/>
+          </p:cNvSpPr>
+          <p:nvPr>
+            <p:ph type="sldImg" idx="2"/>
+          </p:nvPr>
+        </p:nvSpPr>
+        <p:spPr/>
+      </p:sp>
+      <p:sp>
+        <p:nvSpPr>
+          <p:cNvPr id="3" name="Notes Placeholder 2"/>
+          <p:cNvSpPr>
+            <a:spLocks noGrp="1"/>
+          </p:cNvSpPr>
+          <p:nvPr>
+            <p:ph type="body" idx="3" sz="quarter"/>
+          </p:nvPr>
+        </p:nvSpPr>
+        <p:spPr/>
+        <p:txBody>
+          <a:bodyPr/>
+          <a:lstStyle/>
+          <a:p>
+            <a:r>
+              <a:t>Give students a few minutes to write an answer drawn from their own experience and career, then ask two or three to share. Connect their examples back to this seminar's content. In an online section, post the same question to the discussion board.</a:t>
             </a:r>
           </a:p>
         </p:txBody>
@@ -2572,6 +2643,167 @@
             <a:fld id="{F7021451-1387-4CA6-816F-3879F97B5CBC}" type="slidenum">
               <a:rPr b="0" lang="en-US"/>
               <a:t>6</a:t>
+            </a:fld>
+            <a:endParaRPr lang="en-US"/>
+          </a:p>
+        </p:txBody>
+      </p:sp>
+    </p:spTree>
+  </p:cSld>
+  <p:clrMapOvr>
+    <a:masterClrMapping/>
+  </p:clrMapOvr>
+</p:sld>
+</file>
+
+<file path=ppt/slides/slide7.xml><?xml version="1.0" encoding="utf-8"?>
+<p:sld xmlns:a="http://schemas.openxmlformats.org/drawingml/2006/main" xmlns:p="http://schemas.openxmlformats.org/presentationml/2006/main" xmlns:r="http://schemas.openxmlformats.org/officeDocument/2006/relationships">
+  <p:cSld>
+    <p:spTree>
+      <p:nvGrpSpPr>
+        <p:cNvPr id="1" name=""/>
+        <p:cNvGrpSpPr/>
+        <p:nvPr/>
+      </p:nvGrpSpPr>
+      <p:grpSpPr/>
+      <p:sp>
+        <p:nvSpPr>
+          <p:cNvPr id="2" name="Text 0"/>
+          <p:cNvSpPr/>
+          <p:nvPr>
+            <p:ph idx="100" type="title" hasCustomPrompt="1"/>
+          </p:nvPr>
+        </p:nvSpPr>
+        <p:spPr>
+          <a:xfrm>
+            <a:off x="731520" y="457200"/>
+            <a:ext cx="10698480" cy="822960"/>
+          </a:xfrm>
+          <a:prstGeom prst="rect">
+            <a:avLst/>
+          </a:prstGeom>
+          <a:noFill/>
+          <a:ln/>
+        </p:spPr>
+        <p:txBody>
+          <a:bodyPr wrap="square" lIns="0" tIns="0" rIns="0" bIns="0" rtlCol="0" anchor="t"/>
+          <a:lstStyle/>
+          <a:p>
+            <a:pPr algn="l" indent="0" marL="0">
+              <a:buNone/>
+            </a:pPr>
+            <a:r>
+              <a:rPr lang="en-US" sz="3200" b="1" dirty="0">
+                <a:solidFill>
+                  <a:srgbClr val="FFFFFF"/>
+                </a:solidFill>
+              </a:rPr>
+              <a:t>Discussion</a:t>
+            </a:r>
+            <a:endParaRPr lang="en-US" sz="3200" dirty="0"/>
+          </a:p>
+        </p:txBody>
+      </p:sp>
+      <p:sp>
+        <p:nvSpPr>
+          <p:cNvPr id="3" name="Text 0"/>
+          <p:cNvSpPr/>
+          <p:nvPr>
+            <p:ph idx="101" type="body" hasCustomPrompt="1"/>
+          </p:nvPr>
+        </p:nvSpPr>
+        <p:spPr>
+          <a:xfrm>
+            <a:off x="731520" y="1554480"/>
+            <a:ext cx="10698480" cy="4754880"/>
+          </a:xfrm>
+          <a:prstGeom prst="rect">
+            <a:avLst/>
+          </a:prstGeom>
+          <a:noFill/>
+          <a:ln/>
+        </p:spPr>
+        <p:txBody>
+          <a:bodyPr wrap="square" rtlCol="0" anchor="t"/>
+          <a:lstStyle/>
+          <a:p>
+            <a:pPr algn="l" marL="342900" indent="-342900">
+              <a:spcAft>
+                <a:spcPts val="1000"/>
+              </a:spcAft>
+              <a:buSzPct val="100000"/>
+              <a:buChar char="•"/>
+            </a:pPr>
+            <a:r>
+              <a:rPr lang="en-US" sz="2400" dirty="0">
+                <a:solidFill>
+                  <a:srgbClr val="FFFFFF"/>
+                </a:solidFill>
+              </a:rPr>
+              <a:t>If you had budget for one program at your organization next year, which would you choose, and what return would you need to show?</a:t>
+            </a:r>
+            <a:endParaRPr lang="en-US" sz="2400" dirty="0"/>
+          </a:p>
+          <a:p>
+            <a:pPr algn="l" marL="342900" indent="-342900">
+              <a:spcAft>
+                <a:spcPts val="1000"/>
+              </a:spcAft>
+              <a:buSzPct val="100000"/>
+              <a:buChar char="•"/>
+            </a:pPr>
+            <a:r>
+              <a:rPr lang="en-US" sz="2400" dirty="0">
+                <a:solidFill>
+                  <a:srgbClr val="FFFFFF"/>
+                </a:solidFill>
+              </a:rPr>
+              <a:t>Draw on your own experience and career, and apply today's seminar to that setting.</a:t>
+            </a:r>
+            <a:endParaRPr lang="en-US" sz="2400" dirty="0"/>
+          </a:p>
+        </p:txBody>
+      </p:sp>
+      <p:sp>
+        <p:nvSpPr>
+          <p:cNvPr id="25" name="Slide Number Placeholder 0"/>
+          <p:cNvSpPr>
+            <a:spLocks noGrp="1"/>
+          </p:cNvSpPr>
+          <p:nvPr>
+            <p:ph type="sldNum" sz="quarter" idx="4294967295"/>
+          </p:nvPr>
+        </p:nvSpPr>
+        <p:spPr>
+          <a:xfrm>
+            <a:off x="10972800" y="6400800"/>
+            <a:ext cx="548640" cy="274320"/>
+          </a:xfrm>
+          <a:prstGeom prst="rect">
+            <a:avLst/>
+          </a:prstGeom>
+          <a:extLst>
+            <a:ext uri="{C572A759-6A51-4108-AA02-DFA0A04FC94B}">
+              <ma14:wrappingTextBoxFlag xmlns:ma14="http://schemas.microsoft.com/office/mac/drawingml/2011/main" val="0"/>
+            </a:ext>
+          </a:extLst>
+        </p:spPr>
+        <p:txBody>
+          <a:bodyPr/>
+          <a:lstStyle>
+            <a:lvl1pPr>
+              <a:defRPr sz="1000">
+                <a:solidFill>
+                  <a:srgbClr val="BFBFBF"/>
+                </a:solidFill>
+              </a:defRPr>
+            </a:lvl1pPr>
+          </a:lstStyle>
+          <a:p>
+            <a:pPr algn="r"/>
+            <a:fld id="{F7021451-1387-4CA6-816F-3879F97B5CBC}" type="slidenum">
+              <a:rPr b="0" lang="en-US"/>
+              <a:t>7</a:t>
             </a:fld>
             <a:endParaRPr lang="en-US"/>
           </a:p>

--- a/domain-seminars/week13_cross_domain_applications.pptx
+++ b/domain-seminars/week13_cross_domain_applications.pptx
@@ -1619,7 +1619,7 @@
                   <a:srgbClr val="FFFFFF"/>
                 </a:solidFill>
               </a:rPr>
-              <a:t>Cross Domain Applications</a:t>
+              <a:t>Week 13: Cross Domain Applications</a:t>
             </a:r>
             <a:endParaRPr lang="en-US" sz="4000" dirty="0"/>
           </a:p>
